--- a/public/fun/pack/pptx/birthdaypro/돌잔치프리미엄_30_첫번째이야기중심_임페리얼퍼플.pptx
+++ b/public/fun/pack/pptx/birthdaypro/돌잔치프리미엄_30_첫번째이야기중심_임페리얼퍼플.pptx
@@ -112,12 +112,12 @@
   <p:extLst>
     <p:ext uri="{521415D9-36F7-43E2-AB2F-B90AF26B5E84}">
       <p14:sectionLst xmlns:p14="http://schemas.microsoft.com/office/powerpoint/2010/main">
-        <p14:section name="시작" id="{A472EE79-1250-436C-8942-00EA1A97C41F}">
+        <p14:section name="시작" id="{58A60619-3577-4DFD-8942-A3F4308609C5}">
           <p14:sldIdLst>
             <p14:sldId id="256"/>
           </p14:sldIdLst>
         </p14:section>
-        <p14:section name="본문" id="{4E2871DC-5B94-419C-A21F-79A355833FE8}">
+        <p14:section name="본문" id="{84F845D1-A0A1-43FD-8DD2-412FDAE87D4B}">
           <p14:sldIdLst>
             <p14:sldId id="257"/>
             <p14:sldId id="258"/>
@@ -125,7 +125,7 @@
             <p14:sldId id="260"/>
           </p14:sldIdLst>
         </p14:section>
-        <p14:section name="마무리" id="{DBF77FFB-B3C7-4760-9AA2-EFB552238C69}">
+        <p14:section name="마무리" id="{BEF64636-F1D1-4892-A625-1F20EA3DB98D}">
           <p14:sldIdLst>
             <p14:sldId id="261"/>
           </p14:sldIdLst>
@@ -1435,7 +1435,7 @@
             </a:lvl1pPr>
           </a:lstStyle>
           <a:p>
-            <a:fld id="{B6176BED-10E0-4C99-A437-696E78E0C279}" type="slidenum">
+            <a:fld id="{8A367999-CBA3-4B27-B6C7-11DB7B951096}" type="slidenum">
               <a:rPr lang="en-US"/>
               <a:t>‹#›</a:t>
             </a:fld>
@@ -2029,7 +2029,7 @@
             </a:lvl1pPr>
           </a:lstStyle>
           <a:p>
-            <a:fld id="{76B0D22E-AE39-42DA-BACB-9E1C41689FF1}" type="slidenum">
+            <a:fld id="{988D95F8-70A2-40A3-9E58-36761C25C5B7}" type="slidenum">
               <a:rPr lang="en-US"/>
               <a:t>‹#›</a:t>
             </a:fld>
@@ -2655,7 +2655,7 @@
             </a:lvl1pPr>
           </a:lstStyle>
           <a:p>
-            <a:fld id="{B196DC38-20AD-4E1A-8E26-1E06E7F25506}" type="slidenum">
+            <a:fld id="{8082FD3B-0856-45E4-9795-5072D89C0169}" type="slidenum">
               <a:rPr lang="en-US"/>
               <a:t>‹#›</a:t>
             </a:fld>
@@ -3508,7 +3508,7 @@
           <a:p>
             <a:r>
               <a:rPr lang="ko-KR"/>
-              <a:t>아기 이름 · 0000. 00. 00</a:t>
+              <a:t>아기 이름 · 날짜 입력</a:t>
             </a:r>
           </a:p>
           <a:p>
@@ -3668,7 +3668,7 @@
           <a:bodyPr/>
           <a:lstStyle/>
           <a:p>
-            <a:fld id="{61E60A1E-1705-4711-BF62-7C9955C639E8}" type="slidenum">
+            <a:fld id="{05554B3B-5722-439E-9D20-BE3C42876735}" type="slidenum">
               <a:rPr lang="en-US"/>
               <a:t>‹#›</a:t>
             </a:fld>
@@ -4268,7 +4268,7 @@
           <a:bodyPr/>
           <a:lstStyle/>
           <a:p>
-            <a:fld id="{24AC38EB-DAD6-4323-93D5-967684F77746}" type="slidenum">
+            <a:fld id="{DAF38F20-99C2-4B64-ACDB-FDF8C8568157}" type="slidenum">
               <a:rPr lang="en-US"/>
               <a:t>‹#›</a:t>
             </a:fld>
@@ -5110,7 +5110,7 @@
           <a:bodyPr/>
           <a:lstStyle/>
           <a:p>
-            <a:fld id="{8672D8B4-BD55-4F22-8A1C-627FE4B7533E}" type="slidenum">
+            <a:fld id="{FA768B45-B1BE-41E9-A6EE-4A144DD4DAB6}" type="slidenum">
               <a:rPr lang="en-US"/>
               <a:t>‹#›</a:t>
             </a:fld>
@@ -6832,7 +6832,7 @@
           <a:bodyPr/>
           <a:lstStyle/>
           <a:p>
-            <a:fld id="{5E5F32D4-BF9F-4C56-9F2E-B9BA4B9BDEA0}" type="slidenum">
+            <a:fld id="{A47B9F7E-B464-48C8-969C-ACDFEFB14369}" type="slidenum">
               <a:rPr lang="en-US"/>
               <a:t>‹#›</a:t>
             </a:fld>
